--- a/projects/presentation-god/out/ubereats_modern_ja.pptx
+++ b/projects/presentation-god/out/ubereats_modern_ja.pptx
@@ -3110,7 +3110,7 @@
         </p:nvSpPr>
         <p:spPr>
           <a:xfrm>
-            <a:off x="841248" y="1417320"/>
+            <a:off x="841248" y="1325880"/>
             <a:ext cx="7772400" cy="548640"/>
           </a:xfrm>
           <a:prstGeom prst="rect">
@@ -3130,7 +3130,7 @@
               </a:lnSpc>
             </a:pPr>
             <a:r>
-              <a:rPr sz="1600" b="1" i="0">
+              <a:rPr sz="1900" b="1" i="0">
                 <a:solidFill>
                   <a:srgbClr val="FFFFFF"/>
                 </a:solidFill>
@@ -3149,8 +3149,102 @@
         </p:nvSpPr>
         <p:spPr>
           <a:xfrm>
-            <a:off x="841248" y="2148840"/>
+            <a:off x="841248" y="2057400"/>
             <a:ext cx="7863840" cy="2926080"/>
+          </a:xfrm>
+          <a:prstGeom prst="rect">
+            <a:avLst/>
+          </a:prstGeom>
+          <a:noFill/>
+        </p:spPr>
+        <p:txBody>
+          <a:bodyPr wrap="square">
+            <a:spAutoFit/>
+          </a:bodyPr>
+          <a:lstStyle/>
+          <a:p>
+            <a:pPr algn="l">
+              <a:lnSpc>
+                <a:spcPct val="116000"/>
+              </a:lnSpc>
+            </a:pPr>
+            <a:r>
+              <a:rPr sz="4800" b="1" i="0">
+                <a:solidFill>
+                  <a:srgbClr val="FFFFFF"/>
+                </a:solidFill>
+                <a:latin typeface="Yu Gothic"/>
+              </a:rPr>
+              <a:t>「あらゆるモノを、</a:t>
+            </a:r>
+          </a:p>
+          <a:p>
+            <a:pPr algn="l">
+              <a:lnSpc>
+                <a:spcPct val="116000"/>
+              </a:lnSpc>
+            </a:pPr>
+            <a:r>
+              <a:rPr sz="4800" b="1" i="0">
+                <a:solidFill>
+                  <a:srgbClr val="FFFFFF"/>
+                </a:solidFill>
+                <a:latin typeface="Yu Gothic"/>
+              </a:rPr>
+              <a:t>数分で。」</a:t>
+            </a:r>
+          </a:p>
+        </p:txBody>
+      </p:sp>
+      <p:sp>
+        <p:nvSpPr>
+          <p:cNvPr id="4" name="TextBox 3"/>
+          <p:cNvSpPr txBox="1"/>
+          <p:nvPr/>
+        </p:nvSpPr>
+        <p:spPr>
+          <a:xfrm>
+            <a:off x="841248" y="5120640"/>
+            <a:ext cx="7680960" cy="822960"/>
+          </a:xfrm>
+          <a:prstGeom prst="rect">
+            <a:avLst/>
+          </a:prstGeom>
+          <a:noFill/>
+        </p:spPr>
+        <p:txBody>
+          <a:bodyPr wrap="square">
+            <a:spAutoFit/>
+          </a:bodyPr>
+          <a:lstStyle/>
+          <a:p>
+            <a:pPr algn="l">
+              <a:lnSpc>
+                <a:spcPct val="130000"/>
+              </a:lnSpc>
+            </a:pPr>
+            <a:r>
+              <a:rPr sz="2100" b="0" i="0">
+                <a:solidFill>
+                  <a:srgbClr val="DFE8FF"/>
+                </a:solidFill>
+                <a:latin typeface="Yu Gothic"/>
+              </a:rPr>
+              <a:t>フードデリバリーから“ローカル・コマースのOS”へ。</a:t>
+            </a:r>
+          </a:p>
+        </p:txBody>
+      </p:sp>
+      <p:sp>
+        <p:nvSpPr>
+          <p:cNvPr id="5" name="TextBox 4"/>
+          <p:cNvSpPr txBox="1"/>
+          <p:nvPr/>
+        </p:nvSpPr>
+        <p:spPr>
+          <a:xfrm>
+            <a:off x="841248" y="6172200"/>
+            <a:ext cx="5486400" cy="548640"/>
           </a:xfrm>
           <a:prstGeom prst="rect">
             <a:avLst/>
@@ -3169,101 +3263,7 @@
               </a:lnSpc>
             </a:pPr>
             <a:r>
-              <a:rPr sz="4000" b="1" i="0">
-                <a:solidFill>
-                  <a:srgbClr val="FFFFFF"/>
-                </a:solidFill>
-                <a:latin typeface="Yu Gothic"/>
-              </a:rPr>
-              <a:t>「あらゆるモノを、</a:t>
-            </a:r>
-          </a:p>
-          <a:p>
-            <a:pPr algn="l">
-              <a:lnSpc>
-                <a:spcPct val="118000"/>
-              </a:lnSpc>
-            </a:pPr>
-            <a:r>
-              <a:rPr sz="4000" b="1" i="0">
-                <a:solidFill>
-                  <a:srgbClr val="FFFFFF"/>
-                </a:solidFill>
-                <a:latin typeface="Yu Gothic"/>
-              </a:rPr>
-              <a:t>数分で。」</a:t>
-            </a:r>
-          </a:p>
-        </p:txBody>
-      </p:sp>
-      <p:sp>
-        <p:nvSpPr>
-          <p:cNvPr id="4" name="TextBox 3"/>
-          <p:cNvSpPr txBox="1"/>
-          <p:nvPr/>
-        </p:nvSpPr>
-        <p:spPr>
-          <a:xfrm>
-            <a:off x="841248" y="5074920"/>
-            <a:ext cx="7680960" cy="822960"/>
-          </a:xfrm>
-          <a:prstGeom prst="rect">
-            <a:avLst/>
-          </a:prstGeom>
-          <a:noFill/>
-        </p:spPr>
-        <p:txBody>
-          <a:bodyPr wrap="square">
-            <a:spAutoFit/>
-          </a:bodyPr>
-          <a:lstStyle/>
-          <a:p>
-            <a:pPr algn="l">
-              <a:lnSpc>
-                <a:spcPct val="130000"/>
-              </a:lnSpc>
-            </a:pPr>
-            <a:r>
-              <a:rPr sz="1700" b="0" i="0">
-                <a:solidFill>
-                  <a:srgbClr val="DFE8FF"/>
-                </a:solidFill>
-                <a:latin typeface="Yu Gothic"/>
-              </a:rPr>
-              <a:t>フードデリバリーから“ローカル・コマースのOS”へ。</a:t>
-            </a:r>
-          </a:p>
-        </p:txBody>
-      </p:sp>
-      <p:sp>
-        <p:nvSpPr>
-          <p:cNvPr id="5" name="TextBox 4"/>
-          <p:cNvSpPr txBox="1"/>
-          <p:nvPr/>
-        </p:nvSpPr>
-        <p:spPr>
-          <a:xfrm>
-            <a:off x="841248" y="6126480"/>
-            <a:ext cx="5486400" cy="548640"/>
-          </a:xfrm>
-          <a:prstGeom prst="rect">
-            <a:avLst/>
-          </a:prstGeom>
-          <a:noFill/>
-        </p:spPr>
-        <p:txBody>
-          <a:bodyPr wrap="square">
-            <a:spAutoFit/>
-          </a:bodyPr>
-          <a:lstStyle/>
-          <a:p>
-            <a:pPr algn="l">
-              <a:lnSpc>
-                <a:spcPct val="118000"/>
-              </a:lnSpc>
-            </a:pPr>
-            <a:r>
-              <a:rPr sz="1400" b="1" i="0">
+              <a:rPr sz="1600" b="1" i="0">
                 <a:solidFill>
                   <a:srgbClr val="CFDDFF"/>
                 </a:solidFill>
@@ -3282,7 +3282,7 @@
         </p:nvSpPr>
         <p:spPr>
           <a:xfrm>
-            <a:off x="6400800" y="6355080"/>
+            <a:off x="6400800" y="6382512"/>
             <a:ext cx="4937760" cy="548640"/>
           </a:xfrm>
           <a:prstGeom prst="rect">
@@ -3302,7 +3302,7 @@
               </a:lnSpc>
             </a:pPr>
             <a:r>
-              <a:rPr sz="1100" b="0" i="0">
+              <a:rPr sz="1300" b="0" i="0">
                 <a:solidFill>
                   <a:srgbClr val="BFD0FB"/>
                 </a:solidFill>
@@ -3391,7 +3391,7 @@
         </p:nvSpPr>
         <p:spPr>
           <a:xfrm>
-            <a:off x="1024128" y="566928"/>
+            <a:off x="1024128" y="548640"/>
             <a:ext cx="9601200" cy="365760"/>
           </a:xfrm>
           <a:prstGeom prst="rect">
@@ -3411,7 +3411,7 @@
               </a:lnSpc>
             </a:pPr>
             <a:r>
-              <a:rPr sz="1300" b="1" i="0">
+              <a:rPr sz="1500" b="1" i="0">
                 <a:solidFill>
                   <a:srgbClr val="8A93A1"/>
                 </a:solidFill>
@@ -3430,8 +3430,8 @@
         </p:nvSpPr>
         <p:spPr>
           <a:xfrm>
-            <a:off x="841248" y="1115568"/>
-            <a:ext cx="10515600" cy="868680"/>
+            <a:off x="841248" y="1078992"/>
+            <a:ext cx="10515600" cy="914400"/>
           </a:xfrm>
           <a:prstGeom prst="rect">
             <a:avLst/>
@@ -3446,11 +3446,11 @@
           <a:p>
             <a:pPr algn="l">
               <a:lnSpc>
-                <a:spcPct val="110000"/>
+                <a:spcPct val="108000"/>
               </a:lnSpc>
             </a:pPr>
             <a:r>
-              <a:rPr sz="3000" b="1" i="0">
+              <a:rPr sz="3500" b="1" i="0">
                 <a:solidFill>
                   <a:srgbClr val="1B2028"/>
                 </a:solidFill>
@@ -3469,7 +3469,7 @@
         </p:nvSpPr>
         <p:spPr>
           <a:xfrm>
-            <a:off x="841248" y="1993392"/>
+            <a:off x="841248" y="2029968"/>
             <a:ext cx="10515600" cy="731520"/>
           </a:xfrm>
           <a:prstGeom prst="rect">
@@ -3485,11 +3485,11 @@
           <a:p>
             <a:pPr algn="l">
               <a:lnSpc>
-                <a:spcPct val="135000"/>
+                <a:spcPct val="130000"/>
               </a:lnSpc>
             </a:pPr>
             <a:r>
-              <a:rPr sz="1450" b="0" i="0">
+              <a:rPr sz="1800" b="0" i="0">
                 <a:solidFill>
                   <a:srgbClr val="444D5A"/>
                 </a:solidFill>
@@ -3508,7 +3508,7 @@
         </p:nvSpPr>
         <p:spPr>
           <a:xfrm>
-            <a:off x="932688" y="2743200"/>
+            <a:off x="932688" y="2834640"/>
             <a:ext cx="10326319" cy="3657600"/>
           </a:xfrm>
           <a:prstGeom prst="rect">
@@ -3527,11 +3527,11 @@
                 <a:spcPct val="120000"/>
               </a:lnSpc>
               <a:spcAft>
-                <a:spcPts val="1600"/>
+                <a:spcPts val="2200"/>
               </a:spcAft>
             </a:pPr>
             <a:r>
-              <a:rPr sz="1600" b="0" i="0">
+              <a:rPr sz="2100" b="0" i="0">
                 <a:solidFill>
                   <a:srgbClr val="444D5A"/>
                 </a:solidFill>
@@ -3546,11 +3546,11 @@
                 <a:spcPct val="120000"/>
               </a:lnSpc>
               <a:spcAft>
-                <a:spcPts val="1600"/>
+                <a:spcPts val="2200"/>
               </a:spcAft>
             </a:pPr>
             <a:r>
-              <a:rPr sz="1600" b="0" i="0">
+              <a:rPr sz="2100" b="0" i="0">
                 <a:solidFill>
                   <a:srgbClr val="444D5A"/>
                 </a:solidFill>
@@ -3565,11 +3565,11 @@
                 <a:spcPct val="120000"/>
               </a:lnSpc>
               <a:spcAft>
-                <a:spcPts val="1600"/>
+                <a:spcPts val="2200"/>
               </a:spcAft>
             </a:pPr>
             <a:r>
-              <a:rPr sz="1600" b="0" i="0">
+              <a:rPr sz="2100" b="0" i="0">
                 <a:solidFill>
                   <a:srgbClr val="444D5A"/>
                 </a:solidFill>
@@ -3588,7 +3588,7 @@
         </p:nvSpPr>
         <p:spPr>
           <a:xfrm>
-            <a:off x="841248" y="6400800"/>
+            <a:off x="841248" y="6419088"/>
             <a:ext cx="7315200" cy="274320"/>
           </a:xfrm>
           <a:prstGeom prst="rect">
@@ -3608,7 +3608,7 @@
               </a:lnSpc>
             </a:pPr>
             <a:r>
-              <a:rPr sz="1100" b="0" i="0">
+              <a:rPr sz="1250" b="0" i="0">
                 <a:solidFill>
                   <a:srgbClr val="8A93A1"/>
                 </a:solidFill>
@@ -3697,7 +3697,7 @@
         </p:nvSpPr>
         <p:spPr>
           <a:xfrm>
-            <a:off x="1024128" y="566928"/>
+            <a:off x="1024128" y="548640"/>
             <a:ext cx="9601200" cy="365760"/>
           </a:xfrm>
           <a:prstGeom prst="rect">
@@ -3717,7 +3717,7 @@
               </a:lnSpc>
             </a:pPr>
             <a:r>
-              <a:rPr sz="1300" b="1" i="0">
+              <a:rPr sz="1500" b="1" i="0">
                 <a:solidFill>
                   <a:srgbClr val="8A93A1"/>
                 </a:solidFill>
@@ -3736,8 +3736,8 @@
         </p:nvSpPr>
         <p:spPr>
           <a:xfrm>
-            <a:off x="841248" y="1115568"/>
-            <a:ext cx="10515600" cy="868680"/>
+            <a:off x="841248" y="1078992"/>
+            <a:ext cx="10515600" cy="914400"/>
           </a:xfrm>
           <a:prstGeom prst="rect">
             <a:avLst/>
@@ -3752,11 +3752,11 @@
           <a:p>
             <a:pPr algn="l">
               <a:lnSpc>
-                <a:spcPct val="110000"/>
+                <a:spcPct val="108000"/>
               </a:lnSpc>
             </a:pPr>
             <a:r>
-              <a:rPr sz="3000" b="1" i="0">
+              <a:rPr sz="3500" b="1" i="0">
                 <a:solidFill>
                   <a:srgbClr val="1B2028"/>
                 </a:solidFill>
@@ -3775,7 +3775,7 @@
         </p:nvSpPr>
         <p:spPr>
           <a:xfrm>
-            <a:off x="841248" y="1993392"/>
+            <a:off x="841248" y="2029968"/>
             <a:ext cx="10515600" cy="731520"/>
           </a:xfrm>
           <a:prstGeom prst="rect">
@@ -3791,11 +3791,11 @@
           <a:p>
             <a:pPr algn="l">
               <a:lnSpc>
-                <a:spcPct val="135000"/>
+                <a:spcPct val="130000"/>
               </a:lnSpc>
             </a:pPr>
             <a:r>
-              <a:rPr sz="1450" b="0" i="0">
+              <a:rPr sz="1800" b="0" i="0">
                 <a:solidFill>
                   <a:srgbClr val="444D5A"/>
                 </a:solidFill>
@@ -3814,7 +3814,7 @@
         </p:nvSpPr>
         <p:spPr>
           <a:xfrm>
-            <a:off x="841248" y="2697480"/>
+            <a:off x="841248" y="2788920"/>
             <a:ext cx="3259226" cy="3246120"/>
           </a:xfrm>
           <a:prstGeom prst="roundRect">
@@ -3858,7 +3858,7 @@
         </p:nvSpPr>
         <p:spPr>
           <a:xfrm>
-            <a:off x="841248" y="2697480"/>
+            <a:off x="841248" y="2788920"/>
             <a:ext cx="3259226" cy="82296"/>
           </a:xfrm>
           <a:prstGeom prst="rect">
@@ -3902,7 +3902,7 @@
         </p:nvSpPr>
         <p:spPr>
           <a:xfrm>
-            <a:off x="1115568" y="2990088"/>
+            <a:off x="1115568" y="3099815"/>
             <a:ext cx="2710586" cy="731520"/>
           </a:xfrm>
           <a:prstGeom prst="rect">
@@ -3922,7 +3922,7 @@
               </a:lnSpc>
             </a:pPr>
             <a:r>
-              <a:rPr sz="1800" b="1" i="0">
+              <a:rPr sz="2200" b="1" i="0">
                 <a:solidFill>
                   <a:srgbClr val="1B2028"/>
                 </a:solidFill>
@@ -3941,7 +3941,7 @@
         </p:nvSpPr>
         <p:spPr>
           <a:xfrm>
-            <a:off x="1115568" y="3840480"/>
+            <a:off x="1115568" y="3995928"/>
             <a:ext cx="2710586" cy="3657600"/>
           </a:xfrm>
           <a:prstGeom prst="rect">
@@ -3960,11 +3960,11 @@
                 <a:spcPct val="120000"/>
               </a:lnSpc>
               <a:spcAft>
-                <a:spcPts val="800"/>
+                <a:spcPts val="1000"/>
               </a:spcAft>
             </a:pPr>
             <a:r>
-              <a:rPr sz="1300" b="0" i="0">
+              <a:rPr sz="1600" b="0" i="0">
                 <a:solidFill>
                   <a:srgbClr val="444D5A"/>
                 </a:solidFill>
@@ -3979,11 +3979,11 @@
                 <a:spcPct val="120000"/>
               </a:lnSpc>
               <a:spcAft>
-                <a:spcPts val="800"/>
+                <a:spcPts val="1000"/>
               </a:spcAft>
             </a:pPr>
             <a:r>
-              <a:rPr sz="1300" b="0" i="0">
+              <a:rPr sz="1600" b="0" i="0">
                 <a:solidFill>
                   <a:srgbClr val="444D5A"/>
                 </a:solidFill>
@@ -4003,7 +4003,7 @@
         <p:spPr>
           <a:xfrm>
             <a:off x="841248" y="5193792"/>
-            <a:ext cx="3259226" cy="749808"/>
+            <a:ext cx="3259226" cy="841248"/>
           </a:xfrm>
           <a:prstGeom prst="rect">
             <a:avLst/>
@@ -4046,8 +4046,8 @@
         </p:nvSpPr>
         <p:spPr>
           <a:xfrm>
-            <a:off x="1115568" y="5340096"/>
-            <a:ext cx="2710586" cy="502920"/>
+            <a:off x="1115568" y="5376672"/>
+            <a:ext cx="2710586" cy="548640"/>
           </a:xfrm>
           <a:prstGeom prst="rect">
             <a:avLst/>
@@ -4066,7 +4066,7 @@
               </a:lnSpc>
             </a:pPr>
             <a:r>
-              <a:rPr sz="1350" b="1" i="0">
+              <a:rPr sz="1600" b="1" i="0">
                 <a:solidFill>
                   <a:srgbClr val="16713D"/>
                 </a:solidFill>
@@ -4085,7 +4085,7 @@
         </p:nvSpPr>
         <p:spPr>
           <a:xfrm>
-            <a:off x="4466234" y="2697480"/>
+            <a:off x="4466234" y="2788920"/>
             <a:ext cx="3259226" cy="3246120"/>
           </a:xfrm>
           <a:prstGeom prst="roundRect">
@@ -4129,7 +4129,7 @@
         </p:nvSpPr>
         <p:spPr>
           <a:xfrm>
-            <a:off x="4466234" y="2697480"/>
+            <a:off x="4466234" y="2788920"/>
             <a:ext cx="3259226" cy="82296"/>
           </a:xfrm>
           <a:prstGeom prst="rect">
@@ -4173,7 +4173,7 @@
         </p:nvSpPr>
         <p:spPr>
           <a:xfrm>
-            <a:off x="4740554" y="2990088"/>
+            <a:off x="4740554" y="3099815"/>
             <a:ext cx="2710586" cy="731520"/>
           </a:xfrm>
           <a:prstGeom prst="rect">
@@ -4193,7 +4193,7 @@
               </a:lnSpc>
             </a:pPr>
             <a:r>
-              <a:rPr sz="1800" b="1" i="0">
+              <a:rPr sz="2200" b="1" i="0">
                 <a:solidFill>
                   <a:srgbClr val="1B2028"/>
                 </a:solidFill>
@@ -4212,7 +4212,7 @@
         </p:nvSpPr>
         <p:spPr>
           <a:xfrm>
-            <a:off x="4740554" y="3840480"/>
+            <a:off x="4740554" y="3995928"/>
             <a:ext cx="2710586" cy="3657600"/>
           </a:xfrm>
           <a:prstGeom prst="rect">
@@ -4231,11 +4231,11 @@
                 <a:spcPct val="120000"/>
               </a:lnSpc>
               <a:spcAft>
-                <a:spcPts val="800"/>
+                <a:spcPts val="1000"/>
               </a:spcAft>
             </a:pPr>
             <a:r>
-              <a:rPr sz="1300" b="0" i="0">
+              <a:rPr sz="1600" b="0" i="0">
                 <a:solidFill>
                   <a:srgbClr val="444D5A"/>
                 </a:solidFill>
@@ -4250,11 +4250,11 @@
                 <a:spcPct val="120000"/>
               </a:lnSpc>
               <a:spcAft>
-                <a:spcPts val="800"/>
+                <a:spcPts val="1000"/>
               </a:spcAft>
             </a:pPr>
             <a:r>
-              <a:rPr sz="1300" b="0" i="0">
+              <a:rPr sz="1600" b="0" i="0">
                 <a:solidFill>
                   <a:srgbClr val="444D5A"/>
                 </a:solidFill>
@@ -4274,7 +4274,7 @@
         <p:spPr>
           <a:xfrm>
             <a:off x="4466234" y="5193792"/>
-            <a:ext cx="3259226" cy="749808"/>
+            <a:ext cx="3259226" cy="841248"/>
           </a:xfrm>
           <a:prstGeom prst="rect">
             <a:avLst/>
@@ -4317,8 +4317,8 @@
         </p:nvSpPr>
         <p:spPr>
           <a:xfrm>
-            <a:off x="4740554" y="5340096"/>
-            <a:ext cx="2710586" cy="502920"/>
+            <a:off x="4740554" y="5376672"/>
+            <a:ext cx="2710586" cy="548640"/>
           </a:xfrm>
           <a:prstGeom prst="rect">
             <a:avLst/>
@@ -4337,7 +4337,7 @@
               </a:lnSpc>
             </a:pPr>
             <a:r>
-              <a:rPr sz="1350" b="1" i="0">
+              <a:rPr sz="1600" b="1" i="0">
                 <a:solidFill>
                   <a:srgbClr val="16713D"/>
                 </a:solidFill>
@@ -4356,7 +4356,7 @@
         </p:nvSpPr>
         <p:spPr>
           <a:xfrm>
-            <a:off x="8091220" y="2697480"/>
+            <a:off x="8091220" y="2788920"/>
             <a:ext cx="3259226" cy="3246120"/>
           </a:xfrm>
           <a:prstGeom prst="roundRect">
@@ -4400,7 +4400,7 @@
         </p:nvSpPr>
         <p:spPr>
           <a:xfrm>
-            <a:off x="8091220" y="2697480"/>
+            <a:off x="8091220" y="2788920"/>
             <a:ext cx="3259226" cy="82296"/>
           </a:xfrm>
           <a:prstGeom prst="rect">
@@ -4444,7 +4444,7 @@
         </p:nvSpPr>
         <p:spPr>
           <a:xfrm>
-            <a:off x="8365540" y="2990088"/>
+            <a:off x="8365540" y="3099815"/>
             <a:ext cx="2710586" cy="731520"/>
           </a:xfrm>
           <a:prstGeom prst="rect">
@@ -4464,7 +4464,7 @@
               </a:lnSpc>
             </a:pPr>
             <a:r>
-              <a:rPr sz="1800" b="1" i="0">
+              <a:rPr sz="2200" b="1" i="0">
                 <a:solidFill>
                   <a:srgbClr val="1B2028"/>
                 </a:solidFill>
@@ -4483,7 +4483,7 @@
         </p:nvSpPr>
         <p:spPr>
           <a:xfrm>
-            <a:off x="8365540" y="3840480"/>
+            <a:off x="8365540" y="3995928"/>
             <a:ext cx="2710586" cy="3657600"/>
           </a:xfrm>
           <a:prstGeom prst="rect">
@@ -4502,11 +4502,11 @@
                 <a:spcPct val="120000"/>
               </a:lnSpc>
               <a:spcAft>
-                <a:spcPts val="800"/>
+                <a:spcPts val="1000"/>
               </a:spcAft>
             </a:pPr>
             <a:r>
-              <a:rPr sz="1300" b="0" i="0">
+              <a:rPr sz="1600" b="0" i="0">
                 <a:solidFill>
                   <a:srgbClr val="444D5A"/>
                 </a:solidFill>
@@ -4521,11 +4521,11 @@
                 <a:spcPct val="120000"/>
               </a:lnSpc>
               <a:spcAft>
-                <a:spcPts val="800"/>
+                <a:spcPts val="1000"/>
               </a:spcAft>
             </a:pPr>
             <a:r>
-              <a:rPr sz="1300" b="0" i="0">
+              <a:rPr sz="1600" b="0" i="0">
                 <a:solidFill>
                   <a:srgbClr val="444D5A"/>
                 </a:solidFill>
@@ -4545,7 +4545,7 @@
         <p:spPr>
           <a:xfrm>
             <a:off x="8091220" y="5193792"/>
-            <a:ext cx="3259226" cy="749808"/>
+            <a:ext cx="3259226" cy="841248"/>
           </a:xfrm>
           <a:prstGeom prst="rect">
             <a:avLst/>
@@ -4588,8 +4588,8 @@
         </p:nvSpPr>
         <p:spPr>
           <a:xfrm>
-            <a:off x="8365540" y="5340096"/>
-            <a:ext cx="2710586" cy="502920"/>
+            <a:off x="8365540" y="5376672"/>
+            <a:ext cx="2710586" cy="548640"/>
           </a:xfrm>
           <a:prstGeom prst="rect">
             <a:avLst/>
@@ -4608,7 +4608,7 @@
               </a:lnSpc>
             </a:pPr>
             <a:r>
-              <a:rPr sz="1350" b="1" i="0">
+              <a:rPr sz="1600" b="1" i="0">
                 <a:solidFill>
                   <a:srgbClr val="16713D"/>
                 </a:solidFill>
@@ -4627,7 +4627,7 @@
         </p:nvSpPr>
         <p:spPr>
           <a:xfrm>
-            <a:off x="841248" y="6400800"/>
+            <a:off x="841248" y="6419088"/>
             <a:ext cx="7315200" cy="274320"/>
           </a:xfrm>
           <a:prstGeom prst="rect">
@@ -4647,7 +4647,7 @@
               </a:lnSpc>
             </a:pPr>
             <a:r>
-              <a:rPr sz="1100" b="0" i="0">
+              <a:rPr sz="1250" b="0" i="0">
                 <a:solidFill>
                   <a:srgbClr val="8A93A1"/>
                 </a:solidFill>
@@ -4736,7 +4736,7 @@
         </p:nvSpPr>
         <p:spPr>
           <a:xfrm>
-            <a:off x="1024128" y="566928"/>
+            <a:off x="1024128" y="548640"/>
             <a:ext cx="9601200" cy="365760"/>
           </a:xfrm>
           <a:prstGeom prst="rect">
@@ -4756,7 +4756,7 @@
               </a:lnSpc>
             </a:pPr>
             <a:r>
-              <a:rPr sz="1300" b="1" i="0">
+              <a:rPr sz="1500" b="1" i="0">
                 <a:solidFill>
                   <a:srgbClr val="8A93A1"/>
                 </a:solidFill>
@@ -4775,8 +4775,8 @@
         </p:nvSpPr>
         <p:spPr>
           <a:xfrm>
-            <a:off x="841248" y="1115568"/>
-            <a:ext cx="10515600" cy="868680"/>
+            <a:off x="841248" y="1078992"/>
+            <a:ext cx="10515600" cy="914400"/>
           </a:xfrm>
           <a:prstGeom prst="rect">
             <a:avLst/>
@@ -4791,11 +4791,11 @@
           <a:p>
             <a:pPr algn="l">
               <a:lnSpc>
-                <a:spcPct val="110000"/>
+                <a:spcPct val="108000"/>
               </a:lnSpc>
             </a:pPr>
             <a:r>
-              <a:rPr sz="3000" b="1" i="0">
+              <a:rPr sz="3500" b="1" i="0">
                 <a:solidFill>
                   <a:srgbClr val="1B2028"/>
                 </a:solidFill>
@@ -4814,7 +4814,7 @@
         </p:nvSpPr>
         <p:spPr>
           <a:xfrm>
-            <a:off x="841248" y="1993392"/>
+            <a:off x="841248" y="2029968"/>
             <a:ext cx="10515600" cy="731520"/>
           </a:xfrm>
           <a:prstGeom prst="rect">
@@ -4830,11 +4830,11 @@
           <a:p>
             <a:pPr algn="l">
               <a:lnSpc>
-                <a:spcPct val="135000"/>
+                <a:spcPct val="130000"/>
               </a:lnSpc>
             </a:pPr>
             <a:r>
-              <a:rPr sz="1450" b="0" i="0">
+              <a:rPr sz="1800" b="0" i="0">
                 <a:solidFill>
                   <a:srgbClr val="444D5A"/>
                 </a:solidFill>
@@ -4853,7 +4853,7 @@
         </p:nvSpPr>
         <p:spPr>
           <a:xfrm>
-            <a:off x="932688" y="2743200"/>
+            <a:off x="932688" y="2834640"/>
             <a:ext cx="10326319" cy="3657600"/>
           </a:xfrm>
           <a:prstGeom prst="rect">
@@ -4872,11 +4872,11 @@
                 <a:spcPct val="120000"/>
               </a:lnSpc>
               <a:spcAft>
-                <a:spcPts val="1600"/>
+                <a:spcPts val="2200"/>
               </a:spcAft>
             </a:pPr>
             <a:r>
-              <a:rPr sz="1600" b="0" i="0">
+              <a:rPr sz="2100" b="0" i="0">
                 <a:solidFill>
                   <a:srgbClr val="444D5A"/>
                 </a:solidFill>
@@ -4891,11 +4891,11 @@
                 <a:spcPct val="120000"/>
               </a:lnSpc>
               <a:spcAft>
-                <a:spcPts val="1600"/>
+                <a:spcPts val="2200"/>
               </a:spcAft>
             </a:pPr>
             <a:r>
-              <a:rPr sz="1600" b="0" i="0">
+              <a:rPr sz="2100" b="0" i="0">
                 <a:solidFill>
                   <a:srgbClr val="444D5A"/>
                 </a:solidFill>
@@ -4910,11 +4910,11 @@
                 <a:spcPct val="120000"/>
               </a:lnSpc>
               <a:spcAft>
-                <a:spcPts val="1600"/>
+                <a:spcPts val="2200"/>
               </a:spcAft>
             </a:pPr>
             <a:r>
-              <a:rPr sz="1600" b="0" i="0">
+              <a:rPr sz="2100" b="0" i="0">
                 <a:solidFill>
                   <a:srgbClr val="444D5A"/>
                 </a:solidFill>
@@ -4933,7 +4933,7 @@
         </p:nvSpPr>
         <p:spPr>
           <a:xfrm>
-            <a:off x="841248" y="6400800"/>
+            <a:off x="841248" y="6419088"/>
             <a:ext cx="7315200" cy="274320"/>
           </a:xfrm>
           <a:prstGeom prst="rect">
@@ -4953,7 +4953,7 @@
               </a:lnSpc>
             </a:pPr>
             <a:r>
-              <a:rPr sz="1100" b="0" i="0">
+              <a:rPr sz="1250" b="0" i="0">
                 <a:solidFill>
                   <a:srgbClr val="8A93A1"/>
                 </a:solidFill>
@@ -5042,7 +5042,7 @@
         </p:nvSpPr>
         <p:spPr>
           <a:xfrm>
-            <a:off x="1024128" y="566928"/>
+            <a:off x="1024128" y="548640"/>
             <a:ext cx="9601200" cy="365760"/>
           </a:xfrm>
           <a:prstGeom prst="rect">
@@ -5062,7 +5062,7 @@
               </a:lnSpc>
             </a:pPr>
             <a:r>
-              <a:rPr sz="1300" b="1" i="0">
+              <a:rPr sz="1500" b="1" i="0">
                 <a:solidFill>
                   <a:srgbClr val="8A93A1"/>
                 </a:solidFill>
@@ -5081,8 +5081,8 @@
         </p:nvSpPr>
         <p:spPr>
           <a:xfrm>
-            <a:off x="841248" y="1115568"/>
-            <a:ext cx="10515600" cy="868680"/>
+            <a:off x="841248" y="1078992"/>
+            <a:ext cx="10515600" cy="914400"/>
           </a:xfrm>
           <a:prstGeom prst="rect">
             <a:avLst/>
@@ -5097,11 +5097,11 @@
           <a:p>
             <a:pPr algn="l">
               <a:lnSpc>
-                <a:spcPct val="110000"/>
+                <a:spcPct val="108000"/>
               </a:lnSpc>
             </a:pPr>
             <a:r>
-              <a:rPr sz="3000" b="1" i="0">
+              <a:rPr sz="3500" b="1" i="0">
                 <a:solidFill>
                   <a:srgbClr val="1B2028"/>
                 </a:solidFill>
@@ -5120,7 +5120,7 @@
         </p:nvSpPr>
         <p:spPr>
           <a:xfrm>
-            <a:off x="841248" y="1993392"/>
+            <a:off x="841248" y="2029968"/>
             <a:ext cx="10515600" cy="731520"/>
           </a:xfrm>
           <a:prstGeom prst="rect">
@@ -5136,11 +5136,11 @@
           <a:p>
             <a:pPr algn="l">
               <a:lnSpc>
-                <a:spcPct val="135000"/>
+                <a:spcPct val="130000"/>
               </a:lnSpc>
             </a:pPr>
             <a:r>
-              <a:rPr sz="1450" b="0" i="0">
+              <a:rPr sz="1800" b="0" i="0">
                 <a:solidFill>
                   <a:srgbClr val="444D5A"/>
                 </a:solidFill>
@@ -5159,8 +5159,8 @@
         </p:nvSpPr>
         <p:spPr>
           <a:xfrm>
-            <a:off x="841248" y="2834640"/>
-            <a:ext cx="2352979" cy="2468880"/>
+            <a:off x="841248" y="2788920"/>
+            <a:ext cx="2352979" cy="2743200"/>
           </a:xfrm>
           <a:prstGeom prst="roundRect">
             <a:avLst/>
@@ -5203,8 +5203,8 @@
         </p:nvSpPr>
         <p:spPr>
           <a:xfrm>
-            <a:off x="1069848" y="3246120"/>
-            <a:ext cx="1895779" cy="1097280"/>
+            <a:off x="1024128" y="3291839"/>
+            <a:ext cx="1987219" cy="1188720"/>
           </a:xfrm>
           <a:prstGeom prst="rect">
             <a:avLst/>
@@ -5223,7 +5223,7 @@
               </a:lnSpc>
             </a:pPr>
             <a:r>
-              <a:rPr sz="4600" b="1" i="0">
+              <a:rPr sz="4200" b="1" i="0">
                 <a:solidFill>
                   <a:srgbClr val="1F9D55"/>
                 </a:solidFill>
@@ -5242,8 +5242,8 @@
         </p:nvSpPr>
         <p:spPr>
           <a:xfrm>
-            <a:off x="1069848" y="4434840"/>
-            <a:ext cx="1895779" cy="731520"/>
+            <a:off x="1024128" y="4617720"/>
+            <a:ext cx="1987219" cy="777240"/>
           </a:xfrm>
           <a:prstGeom prst="rect">
             <a:avLst/>
@@ -5262,7 +5262,7 @@
               </a:lnSpc>
             </a:pPr>
             <a:r>
-              <a:rPr sz="1350" b="0" i="0">
+              <a:rPr sz="1600" b="0" i="0">
                 <a:solidFill>
                   <a:srgbClr val="444D5A"/>
                 </a:solidFill>
@@ -5278,7 +5278,7 @@
               </a:lnSpc>
             </a:pPr>
             <a:r>
-              <a:rPr sz="1350" b="0" i="0">
+              <a:rPr sz="1600" b="0" i="0">
                 <a:solidFill>
                   <a:srgbClr val="444D5A"/>
                 </a:solidFill>
@@ -5297,8 +5297,8 @@
         </p:nvSpPr>
         <p:spPr>
           <a:xfrm>
-            <a:off x="3559987" y="2834640"/>
-            <a:ext cx="2352979" cy="2468880"/>
+            <a:off x="3559987" y="2788920"/>
+            <a:ext cx="2352979" cy="2743200"/>
           </a:xfrm>
           <a:prstGeom prst="roundRect">
             <a:avLst/>
@@ -5341,8 +5341,8 @@
         </p:nvSpPr>
         <p:spPr>
           <a:xfrm>
-            <a:off x="3788587" y="3246120"/>
-            <a:ext cx="1895779" cy="1097280"/>
+            <a:off x="3742867" y="3291839"/>
+            <a:ext cx="1987219" cy="1188720"/>
           </a:xfrm>
           <a:prstGeom prst="rect">
             <a:avLst/>
@@ -5361,7 +5361,7 @@
               </a:lnSpc>
             </a:pPr>
             <a:r>
-              <a:rPr sz="4600" b="1" i="0">
+              <a:rPr sz="5000" b="1" i="0">
                 <a:solidFill>
                   <a:srgbClr val="1F9D55"/>
                 </a:solidFill>
@@ -5380,8 +5380,8 @@
         </p:nvSpPr>
         <p:spPr>
           <a:xfrm>
-            <a:off x="3788587" y="4434840"/>
-            <a:ext cx="1895779" cy="731520"/>
+            <a:off x="3742867" y="4617720"/>
+            <a:ext cx="1987219" cy="777240"/>
           </a:xfrm>
           <a:prstGeom prst="rect">
             <a:avLst/>
@@ -5400,13 +5400,13 @@
               </a:lnSpc>
             </a:pPr>
             <a:r>
-              <a:rPr sz="1350" b="0" i="0">
+              <a:rPr sz="1600" b="0" i="0">
                 <a:solidFill>
                   <a:srgbClr val="444D5A"/>
                 </a:solidFill>
                 <a:latin typeface="Yu Gothic"/>
               </a:rPr>
-              <a:t>四半期のデリバリー総取扱高</a:t>
+              <a:t>デリバリー総取扱高</a:t>
             </a:r>
           </a:p>
           <a:p>
@@ -5416,13 +5416,13 @@
               </a:lnSpc>
             </a:pPr>
             <a:r>
-              <a:rPr sz="1350" b="0" i="0">
+              <a:rPr sz="1600" b="0" i="0">
                 <a:solidFill>
                   <a:srgbClr val="444D5A"/>
                 </a:solidFill>
                 <a:latin typeface="Yu Gothic"/>
               </a:rPr>
-              <a:t>(2024 Q4・前年比 +18%)</a:t>
+              <a:t>(2024 Q4, 前年比+18%)</a:t>
             </a:r>
           </a:p>
         </p:txBody>
@@ -5435,8 +5435,8 @@
         </p:nvSpPr>
         <p:spPr>
           <a:xfrm>
-            <a:off x="6278727" y="2834640"/>
-            <a:ext cx="2352979" cy="2468880"/>
+            <a:off x="6278727" y="2788920"/>
+            <a:ext cx="2352979" cy="2743200"/>
           </a:xfrm>
           <a:prstGeom prst="roundRect">
             <a:avLst/>
@@ -5479,8 +5479,8 @@
         </p:nvSpPr>
         <p:spPr>
           <a:xfrm>
-            <a:off x="6507327" y="3246120"/>
-            <a:ext cx="1895779" cy="1097280"/>
+            <a:off x="6461607" y="3291839"/>
+            <a:ext cx="1987219" cy="1188720"/>
           </a:xfrm>
           <a:prstGeom prst="rect">
             <a:avLst/>
@@ -5499,7 +5499,7 @@
               </a:lnSpc>
             </a:pPr>
             <a:r>
-              <a:rPr sz="4600" b="1" i="0">
+              <a:rPr sz="3600" b="1" i="0">
                 <a:solidFill>
                   <a:srgbClr val="1F9D55"/>
                 </a:solidFill>
@@ -5518,8 +5518,8 @@
         </p:nvSpPr>
         <p:spPr>
           <a:xfrm>
-            <a:off x="6507327" y="4434840"/>
-            <a:ext cx="1895779" cy="731520"/>
+            <a:off x="6461607" y="4617720"/>
+            <a:ext cx="1987219" cy="777240"/>
           </a:xfrm>
           <a:prstGeom prst="rect">
             <a:avLst/>
@@ -5538,7 +5538,7 @@
               </a:lnSpc>
             </a:pPr>
             <a:r>
-              <a:rPr sz="1350" b="0" i="0">
+              <a:rPr sz="1600" b="0" i="0">
                 <a:solidFill>
                   <a:srgbClr val="444D5A"/>
                 </a:solidFill>
@@ -5554,7 +5554,7 @@
               </a:lnSpc>
             </a:pPr>
             <a:r>
-              <a:rPr sz="1350" b="0" i="0">
+              <a:rPr sz="1600" b="0" i="0">
                 <a:solidFill>
                   <a:srgbClr val="444D5A"/>
                 </a:solidFill>
@@ -5573,8 +5573,8 @@
         </p:nvSpPr>
         <p:spPr>
           <a:xfrm>
-            <a:off x="8997467" y="2834640"/>
-            <a:ext cx="2352979" cy="2468880"/>
+            <a:off x="8997467" y="2788920"/>
+            <a:ext cx="2352979" cy="2743200"/>
           </a:xfrm>
           <a:prstGeom prst="roundRect">
             <a:avLst/>
@@ -5617,8 +5617,8 @@
         </p:nvSpPr>
         <p:spPr>
           <a:xfrm>
-            <a:off x="9226067" y="3246120"/>
-            <a:ext cx="1895779" cy="1097280"/>
+            <a:off x="9180347" y="3291839"/>
+            <a:ext cx="1987219" cy="1188720"/>
           </a:xfrm>
           <a:prstGeom prst="rect">
             <a:avLst/>
@@ -5656,8 +5656,8 @@
         </p:nvSpPr>
         <p:spPr>
           <a:xfrm>
-            <a:off x="9226067" y="4434840"/>
-            <a:ext cx="1895779" cy="731520"/>
+            <a:off x="9180347" y="4617720"/>
+            <a:ext cx="1987219" cy="777240"/>
           </a:xfrm>
           <a:prstGeom prst="rect">
             <a:avLst/>
@@ -5676,7 +5676,7 @@
               </a:lnSpc>
             </a:pPr>
             <a:r>
-              <a:rPr sz="1350" b="0" i="0">
+              <a:rPr sz="1600" b="0" i="0">
                 <a:solidFill>
                   <a:srgbClr val="444D5A"/>
                 </a:solidFill>
@@ -5692,7 +5692,7 @@
               </a:lnSpc>
             </a:pPr>
             <a:r>
-              <a:rPr sz="1350" b="0" i="0">
+              <a:rPr sz="1600" b="0" i="0">
                 <a:solidFill>
                   <a:srgbClr val="444D5A"/>
                 </a:solidFill>
@@ -5711,7 +5711,7 @@
         </p:nvSpPr>
         <p:spPr>
           <a:xfrm>
-            <a:off x="841248" y="6400800"/>
+            <a:off x="841248" y="6419088"/>
             <a:ext cx="7315200" cy="274320"/>
           </a:xfrm>
           <a:prstGeom prst="rect">
@@ -5731,7 +5731,7 @@
               </a:lnSpc>
             </a:pPr>
             <a:r>
-              <a:rPr sz="1100" b="0" i="0">
+              <a:rPr sz="1250" b="0" i="0">
                 <a:solidFill>
                   <a:srgbClr val="8A93A1"/>
                 </a:solidFill>
@@ -5820,7 +5820,7 @@
         </p:nvSpPr>
         <p:spPr>
           <a:xfrm>
-            <a:off x="1024128" y="566928"/>
+            <a:off x="1024128" y="548640"/>
             <a:ext cx="9601200" cy="365760"/>
           </a:xfrm>
           <a:prstGeom prst="rect">
@@ -5840,7 +5840,7 @@
               </a:lnSpc>
             </a:pPr>
             <a:r>
-              <a:rPr sz="1300" b="1" i="0">
+              <a:rPr sz="1500" b="1" i="0">
                 <a:solidFill>
                   <a:srgbClr val="8A93A1"/>
                 </a:solidFill>
@@ -5859,8 +5859,8 @@
         </p:nvSpPr>
         <p:spPr>
           <a:xfrm>
-            <a:off x="841248" y="1115568"/>
-            <a:ext cx="10515600" cy="868680"/>
+            <a:off x="841248" y="1078992"/>
+            <a:ext cx="10515600" cy="914400"/>
           </a:xfrm>
           <a:prstGeom prst="rect">
             <a:avLst/>
@@ -5875,11 +5875,11 @@
           <a:p>
             <a:pPr algn="l">
               <a:lnSpc>
-                <a:spcPct val="110000"/>
+                <a:spcPct val="108000"/>
               </a:lnSpc>
             </a:pPr>
             <a:r>
-              <a:rPr sz="3000" b="1" i="0">
+              <a:rPr sz="3500" b="1" i="0">
                 <a:solidFill>
                   <a:srgbClr val="1B2028"/>
                 </a:solidFill>
@@ -5942,7 +5942,7 @@
         </p:nvSpPr>
         <p:spPr>
           <a:xfrm>
-            <a:off x="1069848" y="3108960"/>
+            <a:off x="1069848" y="3044952"/>
             <a:ext cx="4294479" cy="548640"/>
           </a:xfrm>
           <a:prstGeom prst="rect">
@@ -5962,7 +5962,7 @@
               </a:lnSpc>
             </a:pPr>
             <a:r>
-              <a:rPr sz="1800" b="1" i="0">
+              <a:rPr sz="2300" b="1" i="0">
                 <a:solidFill>
                   <a:srgbClr val="FFFFFF"/>
                 </a:solidFill>
@@ -5981,7 +5981,7 @@
         </p:nvSpPr>
         <p:spPr>
           <a:xfrm>
-            <a:off x="1069848" y="3657600"/>
+            <a:off x="1069848" y="3685032"/>
             <a:ext cx="4294479" cy="640080"/>
           </a:xfrm>
           <a:prstGeom prst="rect">
@@ -6001,7 +6001,7 @@
               </a:lnSpc>
             </a:pPr>
             <a:r>
-              <a:rPr sz="1250" b="0" i="0">
+              <a:rPr sz="1500" b="0" i="0">
                 <a:solidFill>
                   <a:srgbClr val="E4ECFF"/>
                 </a:solidFill>
@@ -6064,7 +6064,7 @@
         </p:nvSpPr>
         <p:spPr>
           <a:xfrm>
-            <a:off x="6827367" y="3108960"/>
+            <a:off x="6827367" y="3044952"/>
             <a:ext cx="4294479" cy="548640"/>
           </a:xfrm>
           <a:prstGeom prst="rect">
@@ -6084,7 +6084,7 @@
               </a:lnSpc>
             </a:pPr>
             <a:r>
-              <a:rPr sz="1800" b="1" i="0">
+              <a:rPr sz="2300" b="1" i="0">
                 <a:solidFill>
                   <a:srgbClr val="FFFFFF"/>
                 </a:solidFill>
@@ -6103,7 +6103,7 @@
         </p:nvSpPr>
         <p:spPr>
           <a:xfrm>
-            <a:off x="6827367" y="3657600"/>
+            <a:off x="6827367" y="3685032"/>
             <a:ext cx="4294479" cy="640080"/>
           </a:xfrm>
           <a:prstGeom prst="rect">
@@ -6123,7 +6123,7 @@
               </a:lnSpc>
             </a:pPr>
             <a:r>
-              <a:rPr sz="1250" b="0" i="0">
+              <a:rPr sz="1500" b="0" i="0">
                 <a:solidFill>
                   <a:srgbClr val="E4ECFF"/>
                 </a:solidFill>
@@ -6186,7 +6186,7 @@
         </p:nvSpPr>
         <p:spPr>
           <a:xfrm>
-            <a:off x="1069848" y="5303520"/>
+            <a:off x="1069848" y="5239512"/>
             <a:ext cx="4294479" cy="548640"/>
           </a:xfrm>
           <a:prstGeom prst="rect">
@@ -6206,7 +6206,7 @@
               </a:lnSpc>
             </a:pPr>
             <a:r>
-              <a:rPr sz="1800" b="1" i="0">
+              <a:rPr sz="2300" b="1" i="0">
                 <a:solidFill>
                   <a:srgbClr val="FFFFFF"/>
                 </a:solidFill>
@@ -6225,7 +6225,7 @@
         </p:nvSpPr>
         <p:spPr>
           <a:xfrm>
-            <a:off x="1069848" y="5852159"/>
+            <a:off x="1069848" y="5879592"/>
             <a:ext cx="4294479" cy="640080"/>
           </a:xfrm>
           <a:prstGeom prst="rect">
@@ -6245,7 +6245,7 @@
               </a:lnSpc>
             </a:pPr>
             <a:r>
-              <a:rPr sz="1250" b="0" i="0">
+              <a:rPr sz="1500" b="0" i="0">
                 <a:solidFill>
                   <a:srgbClr val="E4ECFF"/>
                 </a:solidFill>
@@ -6308,7 +6308,7 @@
         </p:nvSpPr>
         <p:spPr>
           <a:xfrm>
-            <a:off x="6827367" y="5303520"/>
+            <a:off x="6827367" y="5239512"/>
             <a:ext cx="4294479" cy="548640"/>
           </a:xfrm>
           <a:prstGeom prst="rect">
@@ -6328,7 +6328,7 @@
               </a:lnSpc>
             </a:pPr>
             <a:r>
-              <a:rPr sz="1800" b="1" i="0">
+              <a:rPr sz="2300" b="1" i="0">
                 <a:solidFill>
                   <a:srgbClr val="FFFFFF"/>
                 </a:solidFill>
@@ -6347,7 +6347,7 @@
         </p:nvSpPr>
         <p:spPr>
           <a:xfrm>
-            <a:off x="6827367" y="5852159"/>
+            <a:off x="6827367" y="5879592"/>
             <a:ext cx="4294479" cy="640080"/>
           </a:xfrm>
           <a:prstGeom prst="rect">
@@ -6367,7 +6367,7 @@
               </a:lnSpc>
             </a:pPr>
             <a:r>
-              <a:rPr sz="1250" b="0" i="0">
+              <a:rPr sz="1500" b="0" i="0">
                 <a:solidFill>
                   <a:srgbClr val="E4ECFF"/>
                 </a:solidFill>
@@ -6491,7 +6491,7 @@
         </p:nvSpPr>
         <p:spPr>
           <a:xfrm>
-            <a:off x="841248" y="6400800"/>
+            <a:off x="841248" y="6419088"/>
             <a:ext cx="7315200" cy="274320"/>
           </a:xfrm>
           <a:prstGeom prst="rect">
@@ -6511,7 +6511,7 @@
               </a:lnSpc>
             </a:pPr>
             <a:r>
-              <a:rPr sz="1100" b="0" i="0">
+              <a:rPr sz="1250" b="0" i="0">
                 <a:solidFill>
                   <a:srgbClr val="8A93A1"/>
                 </a:solidFill>
@@ -6600,7 +6600,7 @@
         </p:nvSpPr>
         <p:spPr>
           <a:xfrm>
-            <a:off x="1024128" y="566928"/>
+            <a:off x="1024128" y="548640"/>
             <a:ext cx="9601200" cy="365760"/>
           </a:xfrm>
           <a:prstGeom prst="rect">
@@ -6620,7 +6620,7 @@
               </a:lnSpc>
             </a:pPr>
             <a:r>
-              <a:rPr sz="1300" b="1" i="0">
+              <a:rPr sz="1500" b="1" i="0">
                 <a:solidFill>
                   <a:srgbClr val="8A93A1"/>
                 </a:solidFill>
@@ -6639,8 +6639,8 @@
         </p:nvSpPr>
         <p:spPr>
           <a:xfrm>
-            <a:off x="841248" y="1115568"/>
-            <a:ext cx="10515600" cy="868680"/>
+            <a:off x="841248" y="1078992"/>
+            <a:ext cx="10515600" cy="914400"/>
           </a:xfrm>
           <a:prstGeom prst="rect">
             <a:avLst/>
@@ -6655,11 +6655,11 @@
           <a:p>
             <a:pPr algn="l">
               <a:lnSpc>
-                <a:spcPct val="110000"/>
+                <a:spcPct val="108000"/>
               </a:lnSpc>
             </a:pPr>
             <a:r>
-              <a:rPr sz="3000" b="1" i="0">
+              <a:rPr sz="3500" b="1" i="0">
                 <a:solidFill>
                   <a:srgbClr val="1B2028"/>
                 </a:solidFill>
@@ -6678,8 +6678,8 @@
         </p:nvSpPr>
         <p:spPr>
           <a:xfrm>
-            <a:off x="841248" y="2606040"/>
-            <a:ext cx="566928" cy="566928"/>
+            <a:off x="841248" y="2697480"/>
+            <a:ext cx="640080" cy="640080"/>
           </a:xfrm>
           <a:prstGeom prst="roundRect">
             <a:avLst/>
@@ -6722,8 +6722,8 @@
         </p:nvSpPr>
         <p:spPr>
           <a:xfrm>
-            <a:off x="841248" y="2724912"/>
-            <a:ext cx="566928" cy="365760"/>
+            <a:off x="841248" y="2834640"/>
+            <a:ext cx="640080" cy="365760"/>
           </a:xfrm>
           <a:prstGeom prst="rect">
             <a:avLst/>
@@ -6742,7 +6742,7 @@
               </a:lnSpc>
             </a:pPr>
             <a:r>
-              <a:rPr sz="2000" b="1" i="0">
+              <a:rPr sz="2300" b="1" i="0">
                 <a:solidFill>
                   <a:srgbClr val="FFFFFF"/>
                 </a:solidFill>
@@ -6761,8 +6761,8 @@
         </p:nvSpPr>
         <p:spPr>
           <a:xfrm>
-            <a:off x="1709928" y="2624328"/>
-            <a:ext cx="9692640" cy="411480"/>
+            <a:off x="1801368" y="2734056"/>
+            <a:ext cx="9601200" cy="457200"/>
           </a:xfrm>
           <a:prstGeom prst="rect">
             <a:avLst/>
@@ -6781,7 +6781,7 @@
               </a:lnSpc>
             </a:pPr>
             <a:r>
-              <a:rPr sz="1700" b="1" i="0">
+              <a:rPr sz="2100" b="1" i="0">
                 <a:solidFill>
                   <a:srgbClr val="1B2028"/>
                 </a:solidFill>
@@ -6800,8 +6800,8 @@
         </p:nvSpPr>
         <p:spPr>
           <a:xfrm>
-            <a:off x="1709928" y="3017520"/>
-            <a:ext cx="9692640" cy="365760"/>
+            <a:off x="1801368" y="3209544"/>
+            <a:ext cx="9601200" cy="411480"/>
           </a:xfrm>
           <a:prstGeom prst="rect">
             <a:avLst/>
@@ -6820,7 +6820,7 @@
               </a:lnSpc>
             </a:pPr>
             <a:r>
-              <a:rPr sz="1300" b="0" i="0">
+              <a:rPr sz="1500" b="0" i="0">
                 <a:solidFill>
                   <a:srgbClr val="444D5A"/>
                 </a:solidFill>
@@ -6839,8 +6839,8 @@
         </p:nvSpPr>
         <p:spPr>
           <a:xfrm>
-            <a:off x="841248" y="3502152"/>
-            <a:ext cx="566928" cy="566928"/>
+            <a:off x="841248" y="3721608"/>
+            <a:ext cx="640080" cy="640080"/>
           </a:xfrm>
           <a:prstGeom prst="roundRect">
             <a:avLst/>
@@ -6883,8 +6883,8 @@
         </p:nvSpPr>
         <p:spPr>
           <a:xfrm>
-            <a:off x="841248" y="3621024"/>
-            <a:ext cx="566928" cy="365760"/>
+            <a:off x="841248" y="3858768"/>
+            <a:ext cx="640080" cy="365760"/>
           </a:xfrm>
           <a:prstGeom prst="rect">
             <a:avLst/>
@@ -6903,7 +6903,7 @@
               </a:lnSpc>
             </a:pPr>
             <a:r>
-              <a:rPr sz="2000" b="1" i="0">
+              <a:rPr sz="2300" b="1" i="0">
                 <a:solidFill>
                   <a:srgbClr val="FFFFFF"/>
                 </a:solidFill>
@@ -6922,8 +6922,8 @@
         </p:nvSpPr>
         <p:spPr>
           <a:xfrm>
-            <a:off x="1709928" y="3520440"/>
-            <a:ext cx="9692640" cy="411480"/>
+            <a:off x="1801368" y="3758184"/>
+            <a:ext cx="9601200" cy="457200"/>
           </a:xfrm>
           <a:prstGeom prst="rect">
             <a:avLst/>
@@ -6942,7 +6942,7 @@
               </a:lnSpc>
             </a:pPr>
             <a:r>
-              <a:rPr sz="1700" b="1" i="0">
+              <a:rPr sz="2100" b="1" i="0">
                 <a:solidFill>
                   <a:srgbClr val="1B2028"/>
                 </a:solidFill>
@@ -6961,8 +6961,8 @@
         </p:nvSpPr>
         <p:spPr>
           <a:xfrm>
-            <a:off x="1709928" y="3913632"/>
-            <a:ext cx="9692640" cy="365760"/>
+            <a:off x="1801368" y="4233672"/>
+            <a:ext cx="9601200" cy="411480"/>
           </a:xfrm>
           <a:prstGeom prst="rect">
             <a:avLst/>
@@ -6981,7 +6981,7 @@
               </a:lnSpc>
             </a:pPr>
             <a:r>
-              <a:rPr sz="1300" b="0" i="0">
+              <a:rPr sz="1500" b="0" i="0">
                 <a:solidFill>
                   <a:srgbClr val="444D5A"/>
                 </a:solidFill>
@@ -7000,8 +7000,8 @@
         </p:nvSpPr>
         <p:spPr>
           <a:xfrm>
-            <a:off x="841248" y="4398264"/>
-            <a:ext cx="566928" cy="566928"/>
+            <a:off x="841248" y="4745736"/>
+            <a:ext cx="640080" cy="640080"/>
           </a:xfrm>
           <a:prstGeom prst="roundRect">
             <a:avLst/>
@@ -7044,8 +7044,8 @@
         </p:nvSpPr>
         <p:spPr>
           <a:xfrm>
-            <a:off x="841248" y="4517136"/>
-            <a:ext cx="566928" cy="365760"/>
+            <a:off x="841248" y="4882896"/>
+            <a:ext cx="640080" cy="365760"/>
           </a:xfrm>
           <a:prstGeom prst="rect">
             <a:avLst/>
@@ -7064,7 +7064,7 @@
               </a:lnSpc>
             </a:pPr>
             <a:r>
-              <a:rPr sz="2000" b="1" i="0">
+              <a:rPr sz="2300" b="1" i="0">
                 <a:solidFill>
                   <a:srgbClr val="FFFFFF"/>
                 </a:solidFill>
@@ -7083,8 +7083,8 @@
         </p:nvSpPr>
         <p:spPr>
           <a:xfrm>
-            <a:off x="1709928" y="4416552"/>
-            <a:ext cx="9692640" cy="411480"/>
+            <a:off x="1801368" y="4782312"/>
+            <a:ext cx="9601200" cy="457200"/>
           </a:xfrm>
           <a:prstGeom prst="rect">
             <a:avLst/>
@@ -7103,7 +7103,7 @@
               </a:lnSpc>
             </a:pPr>
             <a:r>
-              <a:rPr sz="1700" b="1" i="0">
+              <a:rPr sz="2100" b="1" i="0">
                 <a:solidFill>
                   <a:srgbClr val="1B2028"/>
                 </a:solidFill>
@@ -7122,8 +7122,8 @@
         </p:nvSpPr>
         <p:spPr>
           <a:xfrm>
-            <a:off x="1709928" y="4809744"/>
-            <a:ext cx="9692640" cy="365760"/>
+            <a:off x="1801368" y="5257800"/>
+            <a:ext cx="9601200" cy="411480"/>
           </a:xfrm>
           <a:prstGeom prst="rect">
             <a:avLst/>
@@ -7142,7 +7142,7 @@
               </a:lnSpc>
             </a:pPr>
             <a:r>
-              <a:rPr sz="1300" b="0" i="0">
+              <a:rPr sz="1500" b="0" i="0">
                 <a:solidFill>
                   <a:srgbClr val="444D5A"/>
                 </a:solidFill>
@@ -7161,8 +7161,8 @@
         </p:nvSpPr>
         <p:spPr>
           <a:xfrm>
-            <a:off x="841248" y="5806440"/>
-            <a:ext cx="10509199" cy="640080"/>
+            <a:off x="841248" y="5870448"/>
+            <a:ext cx="10509199" cy="603504"/>
           </a:xfrm>
           <a:prstGeom prst="roundRect">
             <a:avLst/>
@@ -7205,7 +7205,7 @@
         </p:nvSpPr>
         <p:spPr>
           <a:xfrm>
-            <a:off x="1069848" y="5907024"/>
+            <a:off x="1069848" y="5943600"/>
             <a:ext cx="10058400" cy="274320"/>
           </a:xfrm>
           <a:prstGeom prst="rect">
@@ -7225,7 +7225,7 @@
               </a:lnSpc>
             </a:pPr>
             <a:r>
-              <a:rPr sz="1000" b="1" i="0">
+              <a:rPr sz="1100" b="1" i="0">
                 <a:solidFill>
                   <a:srgbClr val="8A93A1"/>
                 </a:solidFill>
@@ -7244,7 +7244,7 @@
         </p:nvSpPr>
         <p:spPr>
           <a:xfrm>
-            <a:off x="1069848" y="6144768"/>
+            <a:off x="1069848" y="6181344"/>
             <a:ext cx="10424160" cy="274320"/>
           </a:xfrm>
           <a:prstGeom prst="rect">
@@ -7264,7 +7264,7 @@
               </a:lnSpc>
             </a:pPr>
             <a:r>
-              <a:rPr sz="1000" b="0" i="0">
+              <a:rPr sz="1100" b="0" i="0">
                 <a:solidFill>
                   <a:srgbClr val="444D5A"/>
                 </a:solidFill>
